--- a/0 Advanced Seasonal Adjustment with RJDemetra.pptx
+++ b/0 Advanced Seasonal Adjustment with RJDemetra.pptx
@@ -371,7 +371,7 @@
           <a:p>
             <a:fld id="{0CBFB8CE-488C-4A7E-87F2-3AF6127C51C1}" type="datetimeFigureOut">
               <a:rPr lang="en-IE" smtClean="0"/>
-              <a:t>16/09/2026</a:t>
+              <a:t>01/10/2026</a:t>
             </a:fld>
             <a:endParaRPr lang="en-IE"/>
           </a:p>
@@ -1657,6 +1657,115 @@
     </a:lvl9pPr>
   </p:notesStyle>
 </p:notesMaster>
+</file>
+
+<file path=ppt/notesSlides/notesSlide1.xml><?xml version="1.0" encoding="utf-8"?>
+<p:notes xmlns:a="http://schemas.openxmlformats.org/drawingml/2006/main" xmlns:r="http://schemas.openxmlformats.org/officeDocument/2006/relationships" xmlns:p="http://schemas.openxmlformats.org/presentationml/2006/main">
+  <p:cSld>
+    <p:spTree>
+      <p:nvGrpSpPr>
+        <p:cNvPr id="1" name=""/>
+        <p:cNvGrpSpPr/>
+        <p:nvPr/>
+      </p:nvGrpSpPr>
+      <p:grpSpPr>
+        <a:xfrm>
+          <a:off x="0" y="0"/>
+          <a:ext cx="0" cy="0"/>
+          <a:chOff x="0" y="0"/>
+          <a:chExt cx="0" cy="0"/>
+        </a:xfrm>
+      </p:grpSpPr>
+      <p:sp>
+        <p:nvSpPr>
+          <p:cNvPr id="2" name="Espace réservé de l'image des diapositives 1"/>
+          <p:cNvSpPr>
+            <a:spLocks noGrp="1" noRot="1" noChangeAspect="1"/>
+          </p:cNvSpPr>
+          <p:nvPr>
+            <p:ph type="sldImg"/>
+          </p:nvPr>
+        </p:nvSpPr>
+        <p:spPr/>
+      </p:sp>
+      <p:sp>
+        <p:nvSpPr>
+          <p:cNvPr id="3" name="Espace réservé des notes 2"/>
+          <p:cNvSpPr>
+            <a:spLocks noGrp="1"/>
+          </p:cNvSpPr>
+          <p:nvPr>
+            <p:ph type="body" idx="1"/>
+          </p:nvPr>
+        </p:nvSpPr>
+        <p:spPr/>
+        <p:txBody>
+          <a:bodyPr/>
+          <a:lstStyle/>
+          <a:p>
+            <a:endParaRPr lang="en-GB" dirty="0"/>
+          </a:p>
+        </p:txBody>
+      </p:sp>
+      <p:sp>
+        <p:nvSpPr>
+          <p:cNvPr id="4" name="Espace réservé du numéro de diapositive 3"/>
+          <p:cNvSpPr>
+            <a:spLocks noGrp="1"/>
+          </p:cNvSpPr>
+          <p:nvPr>
+            <p:ph type="sldNum" idx="12"/>
+          </p:nvPr>
+        </p:nvSpPr>
+        <p:spPr/>
+        <p:txBody>
+          <a:bodyPr/>
+          <a:lstStyle/>
+          <a:p>
+            <a:pPr marL="0" marR="0" lvl="0" indent="0" algn="r" rtl="0">
+              <a:spcBef>
+                <a:spcPts val="0"/>
+              </a:spcBef>
+              <a:spcAft>
+                <a:spcPts val="0"/>
+              </a:spcAft>
+              <a:buNone/>
+            </a:pPr>
+            <a:fld id="{00000000-1234-1234-1234-123412341234}" type="slidenum">
+              <a:rPr lang="en-GB" sz="1200" b="0" i="0" u="none" strike="noStrike" cap="none" smtClean="0">
+                <a:solidFill>
+                  <a:schemeClr val="dk1"/>
+                </a:solidFill>
+                <a:latin typeface="Calibri"/>
+                <a:ea typeface="Calibri"/>
+                <a:cs typeface="Calibri"/>
+                <a:sym typeface="Calibri"/>
+              </a:rPr>
+              <a:t>4</a:t>
+            </a:fld>
+            <a:endParaRPr lang="en-GB" sz="1200" b="0" i="0" u="none" strike="noStrike" cap="none">
+              <a:solidFill>
+                <a:schemeClr val="dk1"/>
+              </a:solidFill>
+              <a:latin typeface="Calibri"/>
+              <a:ea typeface="Calibri"/>
+              <a:cs typeface="Calibri"/>
+              <a:sym typeface="Calibri"/>
+            </a:endParaRPr>
+          </a:p>
+        </p:txBody>
+      </p:sp>
+    </p:spTree>
+    <p:extLst>
+      <p:ext uri="{BB962C8B-B14F-4D97-AF65-F5344CB8AC3E}">
+        <p14:creationId xmlns:p14="http://schemas.microsoft.com/office/powerpoint/2010/main" val="1900519994"/>
+      </p:ext>
+    </p:extLst>
+  </p:cSld>
+  <p:clrMapOvr>
+    <a:masterClrMapping/>
+  </p:clrMapOvr>
+</p:notes>
 </file>
 
 <file path=ppt/slideLayouts/slideLayout1.xml><?xml version="1.0" encoding="utf-8"?>
@@ -6026,6 +6135,10 @@
           <a:lstStyle/>
           <a:p>
             <a:r>
+              <a:rPr lang="en-GB"/>
+              <a:t>0 </a:t>
+            </a:r>
+            <a:r>
               <a:rPr lang="en-GB" dirty="0"/>
               <a:t>Advanced Seasonal</a:t>
             </a:r>
@@ -6189,7 +6302,24 @@
           <a:bodyPr/>
           <a:lstStyle/>
           <a:p>
-            <a:endParaRPr lang="en-GB" dirty="0"/>
+            <a:r>
+              <a:rPr lang="en-GB" dirty="0"/>
+              <a:t>Seasonal adjustment</a:t>
+            </a:r>
+          </a:p>
+          <a:p>
+            <a:pPr lvl="1"/>
+            <a:r>
+              <a:rPr lang="en-GB" dirty="0"/>
+              <a:t>The training is organized around Tramo-Seats and X12-Arima / X13.</a:t>
+            </a:r>
+          </a:p>
+          <a:p>
+            <a:pPr lvl="1"/>
+            <a:r>
+              <a:rPr lang="en-GB" dirty="0"/>
+              <a:t>Some other methods will be shortly discussed</a:t>
+            </a:r>
           </a:p>
         </p:txBody>
       </p:sp>
@@ -6297,7 +6427,44 @@
           <a:bodyPr/>
           <a:lstStyle/>
           <a:p>
-            <a:endParaRPr lang="en-GB"/>
+            <a:r>
+              <a:rPr lang="en-GB" dirty="0"/>
+              <a:t>Seasonal adjustment</a:t>
+            </a:r>
+          </a:p>
+          <a:p>
+            <a:pPr lvl="1"/>
+            <a:r>
+              <a:rPr lang="en-GB" dirty="0"/>
+              <a:t>The training is organized around Tramo-Seats and X12-Arima / X13.</a:t>
+            </a:r>
+          </a:p>
+          <a:p>
+            <a:pPr lvl="1"/>
+            <a:r>
+              <a:rPr lang="en-GB" dirty="0"/>
+              <a:t>Some other methods will be shortly discussed</a:t>
+            </a:r>
+          </a:p>
+          <a:p>
+            <a:r>
+              <a:rPr lang="en-GB" dirty="0"/>
+              <a:t>Advanced seasonal adjustment</a:t>
+            </a:r>
+          </a:p>
+          <a:p>
+            <a:pPr lvl="1"/>
+            <a:r>
+              <a:rPr lang="en-GB" dirty="0"/>
+              <a:t>Not a “push button” approach. </a:t>
+            </a:r>
+          </a:p>
+          <a:p>
+            <a:pPr lvl="1"/>
+            <a:r>
+              <a:rPr lang="en-GB" dirty="0"/>
+              <a:t>Some advanced topics will be introduced (without too technical details)</a:t>
+            </a:r>
           </a:p>
         </p:txBody>
       </p:sp>
@@ -6409,6 +6576,73 @@
           <a:bodyPr/>
           <a:lstStyle/>
           <a:p>
+            <a:r>
+              <a:rPr lang="en-GB" dirty="0">
+                <a:solidFill>
+                  <a:srgbClr val="0E47CB"/>
+                </a:solidFill>
+              </a:rPr>
+              <a:t>Seasonal adjustment</a:t>
+            </a:r>
+          </a:p>
+          <a:p>
+            <a:pPr lvl="1"/>
+            <a:r>
+              <a:rPr lang="en-GB" dirty="0"/>
+              <a:t>The training is organized around Tramo-Seats and X12-Arima / X13.</a:t>
+            </a:r>
+          </a:p>
+          <a:p>
+            <a:pPr lvl="1"/>
+            <a:r>
+              <a:rPr lang="en-GB" dirty="0"/>
+              <a:t>Some other methods will be shortly discussed</a:t>
+            </a:r>
+          </a:p>
+          <a:p>
+            <a:r>
+              <a:rPr lang="en-GB" dirty="0">
+                <a:solidFill>
+                  <a:srgbClr val="0E47CB"/>
+                </a:solidFill>
+              </a:rPr>
+              <a:t>Advanced seasonal adjustment</a:t>
+            </a:r>
+          </a:p>
+          <a:p>
+            <a:pPr lvl="1"/>
+            <a:r>
+              <a:rPr lang="en-GB" dirty="0"/>
+              <a:t>Not a “push button” approach. </a:t>
+            </a:r>
+          </a:p>
+          <a:p>
+            <a:pPr lvl="1"/>
+            <a:r>
+              <a:rPr lang="en-GB" dirty="0"/>
+              <a:t>Some advanced topics will be introduced (without too technical details)</a:t>
+            </a:r>
+          </a:p>
+          <a:p>
+            <a:r>
+              <a:rPr lang="en-GB" dirty="0">
+                <a:solidFill>
+                  <a:srgbClr val="0E47CB"/>
+                </a:solidFill>
+              </a:rPr>
+              <a:t>JDemetra (JD+)</a:t>
+            </a:r>
+          </a:p>
+          <a:p>
+            <a:pPr lvl="1"/>
+            <a:r>
+              <a:rPr lang="en-GB" dirty="0"/>
+              <a:t>Recommended by Eurostat </a:t>
+            </a:r>
+            <a:r>
+              <a:rPr lang="en-GB"/>
+              <a:t>since 2015</a:t>
+            </a:r>
             <a:endParaRPr lang="en-GB" dirty="0"/>
           </a:p>
         </p:txBody>
@@ -6529,7 +6763,86 @@
           <a:bodyPr/>
           <a:lstStyle/>
           <a:p>
-            <a:endParaRPr lang="en-GB" dirty="0"/>
+            <a:r>
+              <a:rPr lang="en-GB" dirty="0">
+                <a:solidFill>
+                  <a:srgbClr val="0E47CB"/>
+                </a:solidFill>
+              </a:rPr>
+              <a:t>Seasonal adjustment</a:t>
+            </a:r>
+          </a:p>
+          <a:p>
+            <a:pPr lvl="1"/>
+            <a:r>
+              <a:rPr lang="en-GB" dirty="0"/>
+              <a:t>The training is organized around Tramo-Seats and X12-Arima / X13.</a:t>
+            </a:r>
+          </a:p>
+          <a:p>
+            <a:pPr lvl="1"/>
+            <a:r>
+              <a:rPr lang="en-GB" dirty="0"/>
+              <a:t>Some other methods will be shortly discussed</a:t>
+            </a:r>
+          </a:p>
+          <a:p>
+            <a:r>
+              <a:rPr lang="en-GB" dirty="0">
+                <a:solidFill>
+                  <a:srgbClr val="0E47CB"/>
+                </a:solidFill>
+              </a:rPr>
+              <a:t>Advanced seasonal adjustment</a:t>
+            </a:r>
+          </a:p>
+          <a:p>
+            <a:pPr lvl="1"/>
+            <a:r>
+              <a:rPr lang="en-GB" dirty="0"/>
+              <a:t>Not a “push button” approach. </a:t>
+            </a:r>
+          </a:p>
+          <a:p>
+            <a:pPr lvl="1"/>
+            <a:r>
+              <a:rPr lang="en-GB" dirty="0"/>
+              <a:t>Some advanced topics will be introduced (without too technical details)</a:t>
+            </a:r>
+          </a:p>
+          <a:p>
+            <a:r>
+              <a:rPr lang="en-GB" dirty="0">
+                <a:solidFill>
+                  <a:srgbClr val="0E47CB"/>
+                </a:solidFill>
+              </a:rPr>
+              <a:t>JDemetra (JD+)</a:t>
+            </a:r>
+          </a:p>
+          <a:p>
+            <a:pPr lvl="1"/>
+            <a:r>
+              <a:rPr lang="en-GB" dirty="0"/>
+              <a:t>Recommended by Eurostat since 2015</a:t>
+            </a:r>
+          </a:p>
+          <a:p>
+            <a:r>
+              <a:rPr lang="en-GB" dirty="0">
+                <a:solidFill>
+                  <a:srgbClr val="0E47CB"/>
+                </a:solidFill>
+              </a:rPr>
+              <a:t>R</a:t>
+            </a:r>
+          </a:p>
+          <a:p>
+            <a:pPr lvl="1"/>
+            <a:r>
+              <a:rPr lang="en-GB" dirty="0"/>
+              <a:t>Flexible tool used in many institutions</a:t>
+            </a:r>
           </a:p>
         </p:txBody>
       </p:sp>
@@ -7498,6 +7811,17 @@
 </file>
 
 <file path=customXml/item1.xml><?xml version="1.0" encoding="utf-8"?>
+<p:properties xmlns:p="http://schemas.microsoft.com/office/2006/metadata/properties" xmlns:xsi="http://www.w3.org/2001/XMLSchema-instance" xmlns:pc="http://schemas.microsoft.com/office/infopath/2007/PartnerControls">
+  <documentManagement>
+    <lcf76f155ced4ddcb4097134ff3c332f xmlns="0e422b70-e85d-4377-8ee0-b6227433d381">
+      <Terms xmlns="http://schemas.microsoft.com/office/infopath/2007/PartnerControls"/>
+    </lcf76f155ced4ddcb4097134ff3c332f>
+    <TaxCatchAll xmlns="199f642e-5af9-486c-ac06-f366742ef41a"/>
+  </documentManagement>
+</p:properties>
+</file>
+
+<file path=customXml/item2.xml><?xml version="1.0" encoding="utf-8"?>
 <?mso-contentType ?>
 <FormTemplates xmlns="http://schemas.microsoft.com/sharepoint/v3/contenttype/forms">
   <Display>DocumentLibraryForm</Display>
@@ -7506,7 +7830,7 @@
 </FormTemplates>
 </file>
 
-<file path=customXml/item2.xml><?xml version="1.0" encoding="utf-8"?>
+<file path=customXml/item3.xml><?xml version="1.0" encoding="utf-8"?>
 <ct:contentTypeSchema xmlns:ct="http://schemas.microsoft.com/office/2006/metadata/contentType" xmlns:ma="http://schemas.microsoft.com/office/2006/metadata/properties/metaAttributes" ct:_="" ma:_="" ma:contentTypeName="Document" ma:contentTypeID="0x010100E6AA5C57F8EADE4E9CD6BB064C0C3195" ma:contentTypeVersion="16" ma:contentTypeDescription="Create a new document." ma:contentTypeScope="" ma:versionID="bb51c19a58f458ddcddd050a07659236">
   <xsd:schema xmlns:xsd="http://www.w3.org/2001/XMLSchema" xmlns:xs="http://www.w3.org/2001/XMLSchema" xmlns:p="http://schemas.microsoft.com/office/2006/metadata/properties" xmlns:ns2="0e422b70-e85d-4377-8ee0-b6227433d381" xmlns:ns3="199f642e-5af9-486c-ac06-f366742ef41a" targetNamespace="http://schemas.microsoft.com/office/2006/metadata/properties" ma:root="true" ma:fieldsID="0ee7a3bac0352a48a43420936abd968a" ns2:_="" ns3:_="">
     <xsd:import namespace="0e422b70-e85d-4377-8ee0-b6227433d381"/>
@@ -7747,18 +8071,24 @@
 </ct:contentTypeSchema>
 </file>
 
-<file path=customXml/item3.xml><?xml version="1.0" encoding="utf-8"?>
-<p:properties xmlns:p="http://schemas.microsoft.com/office/2006/metadata/properties" xmlns:xsi="http://www.w3.org/2001/XMLSchema-instance" xmlns:pc="http://schemas.microsoft.com/office/infopath/2007/PartnerControls">
-  <documentManagement>
-    <lcf76f155ced4ddcb4097134ff3c332f xmlns="0e422b70-e85d-4377-8ee0-b6227433d381">
-      <Terms xmlns="http://schemas.microsoft.com/office/infopath/2007/PartnerControls"/>
-    </lcf76f155ced4ddcb4097134ff3c332f>
-    <TaxCatchAll xmlns="199f642e-5af9-486c-ac06-f366742ef41a"/>
-  </documentManagement>
-</p:properties>
+<file path=customXml/itemProps1.xml><?xml version="1.0" encoding="utf-8"?>
+<ds:datastoreItem xmlns:ds="http://schemas.openxmlformats.org/officeDocument/2006/customXml" ds:itemID="{2D6C293B-B8B4-4284-A17E-9F9E4C32B25A}">
+  <ds:schemaRefs>
+    <ds:schemaRef ds:uri="http://schemas.microsoft.com/office/2006/documentManagement/types"/>
+    <ds:schemaRef ds:uri="http://purl.org/dc/elements/1.1/"/>
+    <ds:schemaRef ds:uri="http://purl.org/dc/terms/"/>
+    <ds:schemaRef ds:uri="http://purl.org/dc/dcmitype/"/>
+    <ds:schemaRef ds:uri="0e422b70-e85d-4377-8ee0-b6227433d381"/>
+    <ds:schemaRef ds:uri="http://schemas.microsoft.com/office/infopath/2007/PartnerControls"/>
+    <ds:schemaRef ds:uri="199f642e-5af9-486c-ac06-f366742ef41a"/>
+    <ds:schemaRef ds:uri="http://schemas.openxmlformats.org/package/2006/metadata/core-properties"/>
+    <ds:schemaRef ds:uri="http://schemas.microsoft.com/office/2006/metadata/properties"/>
+    <ds:schemaRef ds:uri="http://www.w3.org/XML/1998/namespace"/>
+  </ds:schemaRefs>
+</ds:datastoreItem>
 </file>
 
-<file path=customXml/itemProps1.xml><?xml version="1.0" encoding="utf-8"?>
+<file path=customXml/itemProps2.xml><?xml version="1.0" encoding="utf-8"?>
 <ds:datastoreItem xmlns:ds="http://schemas.openxmlformats.org/officeDocument/2006/customXml" ds:itemID="{67DD9E9F-9EEB-4105-B29B-819486C2855A}">
   <ds:schemaRefs>
     <ds:schemaRef ds:uri="http://schemas.microsoft.com/sharepoint/v3/contenttype/forms"/>
@@ -7766,7 +8096,7 @@
 </ds:datastoreItem>
 </file>
 
-<file path=customXml/itemProps2.xml><?xml version="1.0" encoding="utf-8"?>
+<file path=customXml/itemProps3.xml><?xml version="1.0" encoding="utf-8"?>
 <ds:datastoreItem xmlns:ds="http://schemas.openxmlformats.org/officeDocument/2006/customXml" ds:itemID="{04B464EA-1576-49DD-9675-1E3399D4D196}">
   <ds:schemaRefs>
     <ds:schemaRef ds:uri="http://schemas.microsoft.com/office/2006/metadata/contentType"/>
@@ -7783,21 +8113,4 @@
     <ds:schemaRef ds:uri="http://schemas.microsoft.com/internal/obd"/>
   </ds:schemaRefs>
 </ds:datastoreItem>
-</file>
-
-<file path=customXml/itemProps3.xml><?xml version="1.0" encoding="utf-8"?>
-<ds:datastoreItem xmlns:ds="http://schemas.openxmlformats.org/officeDocument/2006/customXml" ds:itemID="{2D6C293B-B8B4-4284-A17E-9F9E4C32B25A}">
-  <ds:schemaRefs>
-    <ds:schemaRef ds:uri="http://schemas.microsoft.com/office/2006/documentManagement/types"/>
-    <ds:schemaRef ds:uri="http://purl.org/dc/elements/1.1/"/>
-    <ds:schemaRef ds:uri="http://purl.org/dc/terms/"/>
-    <ds:schemaRef ds:uri="http://purl.org/dc/dcmitype/"/>
-    <ds:schemaRef ds:uri="0e422b70-e85d-4377-8ee0-b6227433d381"/>
-    <ds:schemaRef ds:uri="http://schemas.microsoft.com/office/infopath/2007/PartnerControls"/>
-    <ds:schemaRef ds:uri="199f642e-5af9-486c-ac06-f366742ef41a"/>
-    <ds:schemaRef ds:uri="http://schemas.openxmlformats.org/package/2006/metadata/core-properties"/>
-    <ds:schemaRef ds:uri="http://schemas.microsoft.com/office/2006/metadata/properties"/>
-    <ds:schemaRef ds:uri="http://www.w3.org/XML/1998/namespace"/>
-  </ds:schemaRefs>
-</ds:datastoreItem>
 </file>